--- a/public/fun/pack/pptx/familypro/가족소개프리미엄_37_아이와함께_시나몬로즈.pptx
+++ b/public/fun/pack/pptx/familypro/가족소개프리미엄_37_아이와함께_시나몬로즈.pptx
@@ -113,12 +113,12 @@
   <p:extLst>
     <p:ext uri="{521415D9-36F7-43E2-AB2F-B90AF26B5E84}">
       <p14:sectionLst xmlns:p14="http://schemas.microsoft.com/office/powerpoint/2010/main">
-        <p14:section name="시작" id="{BDE97967-9793-4155-846B-5B4714CC9258}">
+        <p14:section name="시작" id="{F2353046-50C6-485E-A7DE-B293FB8490C0}">
           <p14:sldIdLst>
             <p14:sldId id="256"/>
           </p14:sldIdLst>
         </p14:section>
-        <p14:section name="본문" id="{5C93FA50-C86E-4B7A-A953-1C987A628E1F}">
+        <p14:section name="본문" id="{5D9444F9-D39A-4395-9DA4-DC927A186905}">
           <p14:sldIdLst>
             <p14:sldId id="257"/>
             <p14:sldId id="258"/>
@@ -127,7 +127,7 @@
             <p14:sldId id="261"/>
           </p14:sldIdLst>
         </p14:section>
-        <p14:section name="마무리" id="{825E257F-7B20-4CE6-9AF2-532452A17545}">
+        <p14:section name="마무리" id="{B2C071F5-A3BC-4D9F-9300-74C322BAD2AC}">
           <p14:sldIdLst>
             <p14:sldId id="262"/>
           </p14:sldIdLst>
@@ -1489,7 +1489,7 @@
             </a:lvl1pPr>
           </a:lstStyle>
           <a:p>
-            <a:fld id="{AEEB6EB8-F149-4AA6-B0D5-8893B36A0B33}" type="slidenum">
+            <a:fld id="{428A615D-5299-44FB-A358-698044DE7E56}" type="slidenum">
               <a:rPr lang="en-US"/>
               <a:t>‹#›</a:t>
             </a:fld>
@@ -2186,7 +2186,7 @@
             </a:lvl1pPr>
           </a:lstStyle>
           <a:p>
-            <a:fld id="{56C1516E-1E6C-4381-8E61-6FF54D93D46B}" type="slidenum">
+            <a:fld id="{4D34BD36-CCD9-4976-ADB6-A35B0C57BFD6}" type="slidenum">
               <a:rPr lang="en-US"/>
               <a:t>‹#›</a:t>
             </a:fld>
@@ -2874,7 +2874,7 @@
             </a:lvl1pPr>
           </a:lstStyle>
           <a:p>
-            <a:fld id="{03DEB6D2-7DCB-4E66-9B8A-0C473530FC68}" type="slidenum">
+            <a:fld id="{898EF153-709E-4453-97F3-391891D0B2FF}" type="slidenum">
               <a:rPr lang="en-US"/>
               <a:t>‹#›</a:t>
             </a:fld>
@@ -3785,7 +3785,7 @@
           <a:p>
             <a:r>
               <a:rPr lang="ko-KR"/>
-              <a:t>학교 종 칠 때까지 기다려 준 아빠</a:t>
+              <a:t>종이 울릴 때까지 기다려 준 아빠</a:t>
             </a:r>
           </a:p>
         </p:txBody>
@@ -3807,7 +3807,7 @@
           <a:p>
             <a:r>
               <a:rPr lang="ko-KR"/>
-              <a:t>아이와 함께 · 0000. 00. 00</a:t>
+              <a:t>아이와 함께 · 날짜 입력</a:t>
             </a:r>
           </a:p>
         </p:txBody>
@@ -4192,7 +4192,7 @@
           <a:bodyPr/>
           <a:lstStyle/>
           <a:p>
-            <a:fld id="{7AECD2EC-E510-4CE1-AA22-BEDD3B432260}" type="slidenum">
+            <a:fld id="{88256DE2-152F-4607-BD8C-BB2D285F3692}" type="slidenum">
               <a:rPr lang="en-US"/>
               <a:t>‹#›</a:t>
             </a:fld>
@@ -4908,7 +4908,7 @@
           <a:bodyPr/>
           <a:lstStyle/>
           <a:p>
-            <a:fld id="{06FDB1FB-78B7-4C2A-953F-0F92A37A55B4}" type="slidenum">
+            <a:fld id="{8B44386B-23E5-4488-811F-EFFEA855D507}" type="slidenum">
               <a:rPr lang="en-US"/>
               <a:t>‹#›</a:t>
             </a:fld>
@@ -5750,7 +5750,7 @@
           <a:bodyPr/>
           <a:lstStyle/>
           <a:p>
-            <a:fld id="{E1F728FF-2074-42FC-B971-21F252E3638E}" type="slidenum">
+            <a:fld id="{AB4A5FB9-4107-4990-9F38-5C1B5DC8BAC8}" type="slidenum">
               <a:rPr lang="en-US"/>
               <a:t>‹#›</a:t>
             </a:fld>
@@ -6999,7 +6999,7 @@
           <a:bodyPr/>
           <a:lstStyle/>
           <a:p>
-            <a:fld id="{E2D9462E-AB94-41F5-B808-A4083C6D5EB6}" type="slidenum">
+            <a:fld id="{9C9E0E22-EBAC-4794-9602-ECB46E3DC689}" type="slidenum">
               <a:rPr lang="en-US"/>
               <a:t>‹#›</a:t>
             </a:fld>
@@ -7087,7 +7087,7 @@
           <a:bodyPr/>
           <a:lstStyle/>
           <a:p>
-            <a:fld id="{F0579F7A-0DF8-4EDC-983B-E020346A3864}" type="slidenum">
+            <a:fld id="{D80E112F-59BE-473D-A6F7-2B3536DF9EDE}" type="slidenum">
               <a:rPr lang="en-US"/>
               <a:t>‹#›</a:t>
             </a:fld>
